--- a/V7RC_IO_Command_Protocol.pptx
+++ b/V7RC_IO_Command_Protocol.pptx
@@ -14,6 +14,8 @@
     <p:sldId id="385" r:id="rId8"/>
     <p:sldId id="386" r:id="rId9"/>
     <p:sldId id="387" r:id="rId10"/>
+    <p:sldId id="388" r:id="rId11"/>
+    <p:sldId id="389" r:id="rId12"/>
   </p:sldIdLst>
   <p:sldSz cx="12192000" cy="6858000"/>
   <p:notesSz cx="6858000" cy="9144000"/>
@@ -112,6 +114,11 @@
       </a:defRPr>
     </a:lvl9pPr>
   </p:defaultTextStyle>
+  <p:extLst>
+    <p:ext uri="{EFAFB233-063F-42B5-8137-9DF3F51BA10A}">
+      <p15:sldGuideLst xmlns:p15="http://schemas.microsoft.com/office/powerpoint/2012/main"/>
+    </p:ext>
+  </p:extLst>
 </p:presentation>
 </file>
 
@@ -262,7 +269,7 @@
           <a:p>
             <a:fld id="{24A4ED94-6A72-5147-A8A8-BF710F722487}" type="datetimeFigureOut">
               <a:rPr kumimoji="1" lang="zh-TW" altLang="en-US" smtClean="0"/>
-              <a:t>2019/12/7</a:t>
+              <a:t>2026/3/14</a:t>
             </a:fld>
             <a:endParaRPr kumimoji="1" lang="zh-TW" altLang="en-US"/>
           </a:p>
@@ -460,7 +467,7 @@
           <a:p>
             <a:fld id="{24A4ED94-6A72-5147-A8A8-BF710F722487}" type="datetimeFigureOut">
               <a:rPr kumimoji="1" lang="zh-TW" altLang="en-US" smtClean="0"/>
-              <a:t>2019/12/7</a:t>
+              <a:t>2026/3/14</a:t>
             </a:fld>
             <a:endParaRPr kumimoji="1" lang="zh-TW" altLang="en-US"/>
           </a:p>
@@ -668,7 +675,7 @@
           <a:p>
             <a:fld id="{24A4ED94-6A72-5147-A8A8-BF710F722487}" type="datetimeFigureOut">
               <a:rPr kumimoji="1" lang="zh-TW" altLang="en-US" smtClean="0"/>
-              <a:t>2019/12/7</a:t>
+              <a:t>2026/3/14</a:t>
             </a:fld>
             <a:endParaRPr kumimoji="1" lang="zh-TW" altLang="en-US"/>
           </a:p>
@@ -866,7 +873,7 @@
           <a:p>
             <a:fld id="{24A4ED94-6A72-5147-A8A8-BF710F722487}" type="datetimeFigureOut">
               <a:rPr kumimoji="1" lang="zh-TW" altLang="en-US" smtClean="0"/>
-              <a:t>2019/12/7</a:t>
+              <a:t>2026/3/14</a:t>
             </a:fld>
             <a:endParaRPr kumimoji="1" lang="zh-TW" altLang="en-US"/>
           </a:p>
@@ -1141,7 +1148,7 @@
           <a:p>
             <a:fld id="{24A4ED94-6A72-5147-A8A8-BF710F722487}" type="datetimeFigureOut">
               <a:rPr kumimoji="1" lang="zh-TW" altLang="en-US" smtClean="0"/>
-              <a:t>2019/12/7</a:t>
+              <a:t>2026/3/14</a:t>
             </a:fld>
             <a:endParaRPr kumimoji="1" lang="zh-TW" altLang="en-US"/>
           </a:p>
@@ -1406,7 +1413,7 @@
           <a:p>
             <a:fld id="{24A4ED94-6A72-5147-A8A8-BF710F722487}" type="datetimeFigureOut">
               <a:rPr kumimoji="1" lang="zh-TW" altLang="en-US" smtClean="0"/>
-              <a:t>2019/12/7</a:t>
+              <a:t>2026/3/14</a:t>
             </a:fld>
             <a:endParaRPr kumimoji="1" lang="zh-TW" altLang="en-US"/>
           </a:p>
@@ -1818,7 +1825,7 @@
           <a:p>
             <a:fld id="{24A4ED94-6A72-5147-A8A8-BF710F722487}" type="datetimeFigureOut">
               <a:rPr kumimoji="1" lang="zh-TW" altLang="en-US" smtClean="0"/>
-              <a:t>2019/12/7</a:t>
+              <a:t>2026/3/14</a:t>
             </a:fld>
             <a:endParaRPr kumimoji="1" lang="zh-TW" altLang="en-US"/>
           </a:p>
@@ -1959,7 +1966,7 @@
           <a:p>
             <a:fld id="{24A4ED94-6A72-5147-A8A8-BF710F722487}" type="datetimeFigureOut">
               <a:rPr kumimoji="1" lang="zh-TW" altLang="en-US" smtClean="0"/>
-              <a:t>2019/12/7</a:t>
+              <a:t>2026/3/14</a:t>
             </a:fld>
             <a:endParaRPr kumimoji="1" lang="zh-TW" altLang="en-US"/>
           </a:p>
@@ -2072,7 +2079,7 @@
           <a:p>
             <a:fld id="{24A4ED94-6A72-5147-A8A8-BF710F722487}" type="datetimeFigureOut">
               <a:rPr kumimoji="1" lang="zh-TW" altLang="en-US" smtClean="0"/>
-              <a:t>2019/12/7</a:t>
+              <a:t>2026/3/14</a:t>
             </a:fld>
             <a:endParaRPr kumimoji="1" lang="zh-TW" altLang="en-US"/>
           </a:p>
@@ -2383,7 +2390,7 @@
           <a:p>
             <a:fld id="{24A4ED94-6A72-5147-A8A8-BF710F722487}" type="datetimeFigureOut">
               <a:rPr kumimoji="1" lang="zh-TW" altLang="en-US" smtClean="0"/>
-              <a:t>2019/12/7</a:t>
+              <a:t>2026/3/14</a:t>
             </a:fld>
             <a:endParaRPr kumimoji="1" lang="zh-TW" altLang="en-US"/>
           </a:p>
@@ -2671,7 +2678,7 @@
           <a:p>
             <a:fld id="{24A4ED94-6A72-5147-A8A8-BF710F722487}" type="datetimeFigureOut">
               <a:rPr kumimoji="1" lang="zh-TW" altLang="en-US" smtClean="0"/>
-              <a:t>2019/12/7</a:t>
+              <a:t>2026/3/14</a:t>
             </a:fld>
             <a:endParaRPr kumimoji="1" lang="zh-TW" altLang="en-US"/>
           </a:p>
@@ -2912,7 +2919,7 @@
           <a:p>
             <a:fld id="{24A4ED94-6A72-5147-A8A8-BF710F722487}" type="datetimeFigureOut">
               <a:rPr kumimoji="1" lang="zh-TW" altLang="en-US" smtClean="0"/>
-              <a:t>2019/12/7</a:t>
+              <a:t>2026/3/14</a:t>
             </a:fld>
             <a:endParaRPr kumimoji="1" lang="zh-TW" altLang="en-US"/>
           </a:p>
@@ -3674,6 +3681,2074 @@
     <p:extLst>
       <p:ext uri="{BB962C8B-B14F-4D97-AF65-F5344CB8AC3E}">
         <p14:creationId xmlns:p14="http://schemas.microsoft.com/office/powerpoint/2010/main" val="1737655514"/>
+      </p:ext>
+    </p:extLst>
+  </p:cSld>
+  <p:clrMapOvr>
+    <a:masterClrMapping/>
+  </p:clrMapOvr>
+  <p:timing>
+    <p:tnLst>
+      <p:par>
+        <p:cTn id="1" dur="indefinite" restart="never" nodeType="tmRoot">
+          <p:childTnLst>
+            <p:seq concurrent="1" nextAc="seek">
+              <p:cTn id="2" dur="indefinite" nodeType="mainSeq">
+                <p:childTnLst>
+                  <p:par>
+                    <p:cTn id="3" fill="hold">
+                      <p:stCondLst>
+                        <p:cond delay="indefinite"/>
+                        <p:cond evt="onBegin" delay="0">
+                          <p:tn val="2"/>
+                        </p:cond>
+                      </p:stCondLst>
+                      <p:childTnLst>
+                        <p:par>
+                          <p:cTn id="4" fill="hold">
+                            <p:stCondLst>
+                              <p:cond delay="0"/>
+                            </p:stCondLst>
+                            <p:childTnLst>
+                              <p:par>
+                                <p:cTn id="5" presetID="2" presetClass="entr" presetSubtype="4" fill="hold" grpId="0" nodeType="afterEffect">
+                                  <p:stCondLst>
+                                    <p:cond delay="0"/>
+                                  </p:stCondLst>
+                                  <p:iterate type="lt">
+                                    <p:tmPct val="10000"/>
+                                  </p:iterate>
+                                  <p:childTnLst>
+                                    <p:set>
+                                      <p:cBhvr>
+                                        <p:cTn id="6" dur="1" fill="hold">
+                                          <p:stCondLst>
+                                            <p:cond delay="0"/>
+                                          </p:stCondLst>
+                                        </p:cTn>
+                                        <p:tgtEl>
+                                          <p:spTgt spid="18"/>
+                                        </p:tgtEl>
+                                        <p:attrNameLst>
+                                          <p:attrName>style.visibility</p:attrName>
+                                        </p:attrNameLst>
+                                      </p:cBhvr>
+                                      <p:to>
+                                        <p:strVal val="visible"/>
+                                      </p:to>
+                                    </p:set>
+                                    <p:anim calcmode="lin" valueType="num">
+                                      <p:cBhvr additive="base">
+                                        <p:cTn id="7" dur="500" fill="hold"/>
+                                        <p:tgtEl>
+                                          <p:spTgt spid="18"/>
+                                        </p:tgtEl>
+                                        <p:attrNameLst>
+                                          <p:attrName>ppt_x</p:attrName>
+                                        </p:attrNameLst>
+                                      </p:cBhvr>
+                                      <p:tavLst>
+                                        <p:tav tm="0">
+                                          <p:val>
+                                            <p:strVal val="#ppt_x"/>
+                                          </p:val>
+                                        </p:tav>
+                                        <p:tav tm="100000">
+                                          <p:val>
+                                            <p:strVal val="#ppt_x"/>
+                                          </p:val>
+                                        </p:tav>
+                                      </p:tavLst>
+                                    </p:anim>
+                                    <p:anim calcmode="lin" valueType="num">
+                                      <p:cBhvr additive="base">
+                                        <p:cTn id="8" dur="500" fill="hold"/>
+                                        <p:tgtEl>
+                                          <p:spTgt spid="18"/>
+                                        </p:tgtEl>
+                                        <p:attrNameLst>
+                                          <p:attrName>ppt_y</p:attrName>
+                                        </p:attrNameLst>
+                                      </p:cBhvr>
+                                      <p:tavLst>
+                                        <p:tav tm="0">
+                                          <p:val>
+                                            <p:strVal val="1+#ppt_h/2"/>
+                                          </p:val>
+                                        </p:tav>
+                                        <p:tav tm="100000">
+                                          <p:val>
+                                            <p:strVal val="#ppt_y"/>
+                                          </p:val>
+                                        </p:tav>
+                                      </p:tavLst>
+                                    </p:anim>
+                                  </p:childTnLst>
+                                </p:cTn>
+                              </p:par>
+                            </p:childTnLst>
+                          </p:cTn>
+                        </p:par>
+                      </p:childTnLst>
+                    </p:cTn>
+                  </p:par>
+                </p:childTnLst>
+              </p:cTn>
+              <p:prevCondLst>
+                <p:cond evt="onPrev" delay="0">
+                  <p:tgtEl>
+                    <p:sldTgt/>
+                  </p:tgtEl>
+                </p:cond>
+              </p:prevCondLst>
+              <p:nextCondLst>
+                <p:cond evt="onNext" delay="0">
+                  <p:tgtEl>
+                    <p:sldTgt/>
+                  </p:tgtEl>
+                </p:cond>
+              </p:nextCondLst>
+            </p:seq>
+          </p:childTnLst>
+        </p:cTn>
+      </p:par>
+    </p:tnLst>
+    <p:bldLst>
+      <p:bldP spid="18" grpId="0"/>
+    </p:bldLst>
+  </p:timing>
+</p:sld>
+</file>
+
+<file path=ppt/slides/slide10.xml><?xml version="1.0" encoding="utf-8"?>
+<p:sld xmlns:a="http://schemas.openxmlformats.org/drawingml/2006/main" xmlns:r="http://schemas.openxmlformats.org/officeDocument/2006/relationships" xmlns:p="http://schemas.openxmlformats.org/presentationml/2006/main">
+  <p:cSld>
+    <p:spTree>
+      <p:nvGrpSpPr>
+        <p:cNvPr id="1" name="">
+          <a:extLst>
+            <a:ext uri="{FF2B5EF4-FFF2-40B4-BE49-F238E27FC236}">
+              <a16:creationId xmlns:a16="http://schemas.microsoft.com/office/drawing/2014/main" id="{4F1938E3-E3E9-AD6E-3288-20EB20BE175B}"/>
+            </a:ext>
+          </a:extLst>
+        </p:cNvPr>
+        <p:cNvGrpSpPr/>
+        <p:nvPr/>
+      </p:nvGrpSpPr>
+      <p:grpSpPr>
+        <a:xfrm>
+          <a:off x="0" y="0"/>
+          <a:ext cx="0" cy="0"/>
+          <a:chOff x="0" y="0"/>
+          <a:chExt cx="0" cy="0"/>
+        </a:xfrm>
+      </p:grpSpPr>
+      <p:sp>
+        <p:nvSpPr>
+          <p:cNvPr id="18" name="文本框 3">
+            <a:extLst>
+              <a:ext uri="{FF2B5EF4-FFF2-40B4-BE49-F238E27FC236}">
+                <a16:creationId xmlns:a16="http://schemas.microsoft.com/office/drawing/2014/main" id="{C71B165E-94CB-6A93-DBBE-F78C0EC9DDDA}"/>
+              </a:ext>
+            </a:extLst>
+          </p:cNvPr>
+          <p:cNvSpPr txBox="1"/>
+          <p:nvPr/>
+        </p:nvSpPr>
+        <p:spPr>
+          <a:xfrm>
+            <a:off x="168965" y="318644"/>
+            <a:ext cx="9879810" cy="584775"/>
+          </a:xfrm>
+          <a:prstGeom prst="rect">
+            <a:avLst/>
+          </a:prstGeom>
+          <a:noFill/>
+          <a:effectLst/>
+        </p:spPr>
+        <p:txBody>
+          <a:bodyPr wrap="square" rtlCol="0">
+            <a:spAutoFit/>
+          </a:bodyPr>
+          <a:lstStyle/>
+          <a:p>
+            <a:r>
+              <a:rPr lang="en-US" altLang="zh-TW" sz="3200" b="1" kern="2200" spc="600" dirty="0">
+                <a:gradFill flip="none" rotWithShape="1">
+                  <a:gsLst>
+                    <a:gs pos="0">
+                      <a:srgbClr val="0070C0">
+                        <a:shade val="30000"/>
+                        <a:satMod val="115000"/>
+                      </a:srgbClr>
+                    </a:gs>
+                    <a:gs pos="44000">
+                      <a:srgbClr val="0070C0">
+                        <a:shade val="67500"/>
+                        <a:satMod val="115000"/>
+                      </a:srgbClr>
+                    </a:gs>
+                    <a:gs pos="75000">
+                      <a:srgbClr val="00B0F0"/>
+                    </a:gs>
+                    <a:gs pos="56000">
+                      <a:srgbClr val="0070C0">
+                        <a:shade val="100000"/>
+                        <a:satMod val="115000"/>
+                      </a:srgbClr>
+                    </a:gs>
+                  </a:gsLst>
+                  <a:lin ang="18000000" scaled="0"/>
+                  <a:tileRect/>
+                </a:gradFill>
+                <a:latin typeface="微软雅黑" pitchFamily="34" charset="-122"/>
+                <a:ea typeface="微软雅黑" pitchFamily="34" charset="-122"/>
+              </a:rPr>
+              <a:t>V7RC protocol </a:t>
+            </a:r>
+            <a:r>
+              <a:rPr lang="zh-TW" altLang="en-US" sz="3200" b="1" kern="2200" spc="600" dirty="0">
+                <a:gradFill flip="none" rotWithShape="1">
+                  <a:gsLst>
+                    <a:gs pos="0">
+                      <a:srgbClr val="0070C0">
+                        <a:shade val="30000"/>
+                        <a:satMod val="115000"/>
+                      </a:srgbClr>
+                    </a:gs>
+                    <a:gs pos="44000">
+                      <a:srgbClr val="0070C0">
+                        <a:shade val="67500"/>
+                        <a:satMod val="115000"/>
+                      </a:srgbClr>
+                    </a:gs>
+                    <a:gs pos="75000">
+                      <a:srgbClr val="00B0F0"/>
+                    </a:gs>
+                    <a:gs pos="56000">
+                      <a:srgbClr val="0070C0">
+                        <a:shade val="100000"/>
+                        <a:satMod val="115000"/>
+                      </a:srgbClr>
+                    </a:gs>
+                  </a:gsLst>
+                  <a:lin ang="18000000" scaled="0"/>
+                  <a:tileRect/>
+                </a:gradFill>
+                <a:latin typeface="微软雅黑" pitchFamily="34" charset="-122"/>
+                <a:ea typeface="微软雅黑" pitchFamily="34" charset="-122"/>
+              </a:rPr>
+              <a:t>說明</a:t>
+            </a:r>
+          </a:p>
+        </p:txBody>
+      </p:sp>
+      <p:grpSp>
+        <p:nvGrpSpPr>
+          <p:cNvPr id="4" name="群組 3">
+            <a:extLst>
+              <a:ext uri="{FF2B5EF4-FFF2-40B4-BE49-F238E27FC236}">
+                <a16:creationId xmlns:a16="http://schemas.microsoft.com/office/drawing/2014/main" id="{06359B69-3E1C-70DA-8C8A-8427A4416CAE}"/>
+              </a:ext>
+            </a:extLst>
+          </p:cNvPr>
+          <p:cNvGrpSpPr/>
+          <p:nvPr/>
+        </p:nvGrpSpPr>
+        <p:grpSpPr>
+          <a:xfrm>
+            <a:off x="905558" y="1128262"/>
+            <a:ext cx="10646360" cy="603306"/>
+            <a:chOff x="3975611" y="1640950"/>
+            <a:chExt cx="2457617" cy="482832"/>
+          </a:xfrm>
+        </p:grpSpPr>
+        <p:sp>
+          <p:nvSpPr>
+            <p:cNvPr id="5" name="圓角矩形 36">
+              <a:extLst>
+                <a:ext uri="{FF2B5EF4-FFF2-40B4-BE49-F238E27FC236}">
+                  <a16:creationId xmlns:a16="http://schemas.microsoft.com/office/drawing/2014/main" id="{894ED188-3D12-996C-7547-A7FF7E837287}"/>
+                </a:ext>
+              </a:extLst>
+            </p:cNvPr>
+            <p:cNvSpPr/>
+            <p:nvPr/>
+          </p:nvSpPr>
+          <p:spPr>
+            <a:xfrm>
+              <a:off x="3975611" y="1640950"/>
+              <a:ext cx="2382162" cy="482832"/>
+            </a:xfrm>
+            <a:prstGeom prst="roundRect">
+              <a:avLst/>
+            </a:prstGeom>
+          </p:spPr>
+          <p:style>
+            <a:lnRef idx="2">
+              <a:schemeClr val="accent1"/>
+            </a:lnRef>
+            <a:fillRef idx="1">
+              <a:schemeClr val="lt1"/>
+            </a:fillRef>
+            <a:effectRef idx="0">
+              <a:schemeClr val="accent1"/>
+            </a:effectRef>
+            <a:fontRef idx="minor">
+              <a:schemeClr val="dk1"/>
+            </a:fontRef>
+          </p:style>
+          <p:txBody>
+            <a:bodyPr rtlCol="0" anchor="ctr"/>
+            <a:lstStyle/>
+            <a:p>
+              <a:pPr algn="ctr"/>
+              <a:endParaRPr kumimoji="1" lang="zh-TW" altLang="en-US"/>
+            </a:p>
+          </p:txBody>
+        </p:sp>
+        <p:sp>
+          <p:nvSpPr>
+            <p:cNvPr id="7" name="文本框 3">
+              <a:extLst>
+                <a:ext uri="{FF2B5EF4-FFF2-40B4-BE49-F238E27FC236}">
+                  <a16:creationId xmlns:a16="http://schemas.microsoft.com/office/drawing/2014/main" id="{F8C1ABD1-9C5E-0B1F-C3F1-72B5CD4F27D6}"/>
+                </a:ext>
+              </a:extLst>
+            </p:cNvPr>
+            <p:cNvSpPr txBox="1"/>
+            <p:nvPr/>
+          </p:nvSpPr>
+          <p:spPr>
+            <a:xfrm>
+              <a:off x="4031520" y="1732753"/>
+              <a:ext cx="2401708" cy="295580"/>
+            </a:xfrm>
+            <a:prstGeom prst="rect">
+              <a:avLst/>
+            </a:prstGeom>
+            <a:noFill/>
+            <a:effectLst/>
+          </p:spPr>
+          <p:txBody>
+            <a:bodyPr wrap="square" rtlCol="0">
+              <a:spAutoFit/>
+            </a:bodyPr>
+            <a:lstStyle/>
+            <a:p>
+              <a:r>
+                <a:rPr lang="en-US" altLang="zh-CN" b="1" kern="2200" dirty="0">
+                  <a:gradFill flip="none" rotWithShape="1">
+                    <a:gsLst>
+                      <a:gs pos="0">
+                        <a:srgbClr val="0070C0">
+                          <a:shade val="30000"/>
+                          <a:satMod val="115000"/>
+                        </a:srgbClr>
+                      </a:gs>
+                      <a:gs pos="44000">
+                        <a:srgbClr val="0070C0">
+                          <a:shade val="67500"/>
+                          <a:satMod val="115000"/>
+                        </a:srgbClr>
+                      </a:gs>
+                      <a:gs pos="75000">
+                        <a:srgbClr val="00B0F0"/>
+                      </a:gs>
+                      <a:gs pos="56000">
+                        <a:srgbClr val="0070C0">
+                          <a:shade val="100000"/>
+                          <a:satMod val="115000"/>
+                        </a:srgbClr>
+                      </a:gs>
+                    </a:gsLst>
+                    <a:lin ang="18000000" scaled="0"/>
+                    <a:tileRect/>
+                  </a:gradFill>
+                  <a:latin typeface="+mj-lt"/>
+                  <a:ea typeface="Microsoft JhengHei" panose="020B0604030504040204" pitchFamily="34" charset="-120"/>
+                </a:rPr>
+                <a:t>H. LE? : 20 Bytes; ?</a:t>
+              </a:r>
+              <a:r>
+                <a:rPr lang="zh-CN" altLang="en-US" b="1" kern="2200" dirty="0">
+                  <a:gradFill flip="none" rotWithShape="1">
+                    <a:gsLst>
+                      <a:gs pos="0">
+                        <a:srgbClr val="0070C0">
+                          <a:shade val="30000"/>
+                          <a:satMod val="115000"/>
+                        </a:srgbClr>
+                      </a:gs>
+                      <a:gs pos="44000">
+                        <a:srgbClr val="0070C0">
+                          <a:shade val="67500"/>
+                          <a:satMod val="115000"/>
+                        </a:srgbClr>
+                      </a:gs>
+                      <a:gs pos="75000">
+                        <a:srgbClr val="00B0F0"/>
+                      </a:gs>
+                      <a:gs pos="56000">
+                        <a:srgbClr val="0070C0">
+                          <a:shade val="100000"/>
+                          <a:satMod val="115000"/>
+                        </a:srgbClr>
+                      </a:gs>
+                    </a:gsLst>
+                    <a:lin ang="18000000" scaled="0"/>
+                    <a:tileRect/>
+                  </a:gradFill>
+                  <a:latin typeface="+mj-lt"/>
+                  <a:ea typeface="Microsoft JhengHei" panose="020B0604030504040204" pitchFamily="34" charset="-120"/>
+                </a:rPr>
+                <a:t>代表數字</a:t>
+              </a:r>
+              <a:r>
+                <a:rPr lang="en-US" altLang="zh-CN" b="1" kern="2200" dirty="0">
+                  <a:gradFill flip="none" rotWithShape="1">
+                    <a:gsLst>
+                      <a:gs pos="0">
+                        <a:srgbClr val="0070C0">
+                          <a:shade val="30000"/>
+                          <a:satMod val="115000"/>
+                        </a:srgbClr>
+                      </a:gs>
+                      <a:gs pos="44000">
+                        <a:srgbClr val="0070C0">
+                          <a:shade val="67500"/>
+                          <a:satMod val="115000"/>
+                        </a:srgbClr>
+                      </a:gs>
+                      <a:gs pos="75000">
+                        <a:srgbClr val="00B0F0"/>
+                      </a:gs>
+                      <a:gs pos="56000">
+                        <a:srgbClr val="0070C0">
+                          <a:shade val="100000"/>
+                          <a:satMod val="115000"/>
+                        </a:srgbClr>
+                      </a:gs>
+                    </a:gsLst>
+                    <a:lin ang="18000000" scaled="0"/>
+                    <a:tileRect/>
+                  </a:gradFill>
+                  <a:latin typeface="+mj-lt"/>
+                  <a:ea typeface="Microsoft JhengHei" panose="020B0604030504040204" pitchFamily="34" charset="-120"/>
+                </a:rPr>
+                <a:t>N</a:t>
+              </a:r>
+              <a:r>
+                <a:rPr lang="zh-CN" altLang="en-US" b="1" kern="2200" dirty="0">
+                  <a:gradFill flip="none" rotWithShape="1">
+                    <a:gsLst>
+                      <a:gs pos="0">
+                        <a:srgbClr val="0070C0">
+                          <a:shade val="30000"/>
+                          <a:satMod val="115000"/>
+                        </a:srgbClr>
+                      </a:gs>
+                      <a:gs pos="44000">
+                        <a:srgbClr val="0070C0">
+                          <a:shade val="67500"/>
+                          <a:satMod val="115000"/>
+                        </a:srgbClr>
+                      </a:gs>
+                      <a:gs pos="75000">
+                        <a:srgbClr val="00B0F0"/>
+                      </a:gs>
+                      <a:gs pos="56000">
+                        <a:srgbClr val="0070C0">
+                          <a:shade val="100000"/>
+                          <a:satMod val="115000"/>
+                        </a:srgbClr>
+                      </a:gs>
+                    </a:gsLst>
+                    <a:lin ang="18000000" scaled="0"/>
+                    <a:tileRect/>
+                  </a:gradFill>
+                  <a:latin typeface="+mj-lt"/>
+                  <a:ea typeface="Microsoft JhengHei" panose="020B0604030504040204" pitchFamily="34" charset="-120"/>
+                </a:rPr>
+                <a:t>，表示</a:t>
+              </a:r>
+              <a:r>
+                <a:rPr lang="en-US" altLang="zh-CN" b="1" kern="2200" dirty="0">
+                  <a:gradFill flip="none" rotWithShape="1">
+                    <a:gsLst>
+                      <a:gs pos="0">
+                        <a:srgbClr val="0070C0">
+                          <a:shade val="30000"/>
+                          <a:satMod val="115000"/>
+                        </a:srgbClr>
+                      </a:gs>
+                      <a:gs pos="44000">
+                        <a:srgbClr val="0070C0">
+                          <a:shade val="67500"/>
+                          <a:satMod val="115000"/>
+                        </a:srgbClr>
+                      </a:gs>
+                      <a:gs pos="75000">
+                        <a:srgbClr val="00B0F0"/>
+                      </a:gs>
+                      <a:gs pos="56000">
+                        <a:srgbClr val="0070C0">
+                          <a:shade val="100000"/>
+                          <a:satMod val="115000"/>
+                        </a:srgbClr>
+                      </a:gs>
+                    </a:gsLst>
+                    <a:lin ang="18000000" scaled="0"/>
+                    <a:tileRect/>
+                  </a:gradFill>
+                  <a:latin typeface="+mj-lt"/>
+                  <a:ea typeface="Microsoft JhengHei" panose="020B0604030504040204" pitchFamily="34" charset="-120"/>
+                </a:rPr>
+                <a:t> </a:t>
+              </a:r>
+              <a:r>
+                <a:rPr lang="zh-TW" altLang="en-US" b="1" kern="2200" dirty="0">
+                  <a:gradFill flip="none" rotWithShape="1">
+                    <a:gsLst>
+                      <a:gs pos="0">
+                        <a:srgbClr val="0070C0">
+                          <a:shade val="30000"/>
+                          <a:satMod val="115000"/>
+                        </a:srgbClr>
+                      </a:gs>
+                      <a:gs pos="44000">
+                        <a:srgbClr val="0070C0">
+                          <a:shade val="67500"/>
+                          <a:satMod val="115000"/>
+                        </a:srgbClr>
+                      </a:gs>
+                      <a:gs pos="75000">
+                        <a:srgbClr val="00B0F0"/>
+                      </a:gs>
+                      <a:gs pos="56000">
+                        <a:srgbClr val="0070C0">
+                          <a:shade val="100000"/>
+                          <a:satMod val="115000"/>
+                        </a:srgbClr>
+                      </a:gs>
+                    </a:gsLst>
+                    <a:lin ang="18000000" scaled="0"/>
+                    <a:tileRect/>
+                  </a:gradFill>
+                  <a:latin typeface="+mj-lt"/>
+                  <a:ea typeface="Microsoft JhengHei" panose="020B0604030504040204" pitchFamily="34" charset="-120"/>
+                </a:rPr>
+                <a:t>分別顯示第</a:t>
+              </a:r>
+              <a:r>
+                <a:rPr lang="en-US" altLang="zh-TW" b="1" kern="2200" dirty="0">
+                  <a:gradFill flip="none" rotWithShape="1">
+                    <a:gsLst>
+                      <a:gs pos="0">
+                        <a:srgbClr val="0070C0">
+                          <a:shade val="30000"/>
+                          <a:satMod val="115000"/>
+                        </a:srgbClr>
+                      </a:gs>
+                      <a:gs pos="44000">
+                        <a:srgbClr val="0070C0">
+                          <a:shade val="67500"/>
+                          <a:satMod val="115000"/>
+                        </a:srgbClr>
+                      </a:gs>
+                      <a:gs pos="75000">
+                        <a:srgbClr val="00B0F0"/>
+                      </a:gs>
+                      <a:gs pos="56000">
+                        <a:srgbClr val="0070C0">
+                          <a:shade val="100000"/>
+                          <a:satMod val="115000"/>
+                        </a:srgbClr>
+                      </a:gs>
+                    </a:gsLst>
+                    <a:lin ang="18000000" scaled="0"/>
+                    <a:tileRect/>
+                  </a:gradFill>
+                  <a:latin typeface="+mj-lt"/>
+                  <a:ea typeface="Microsoft JhengHei" panose="020B0604030504040204" pitchFamily="34" charset="-120"/>
+                </a:rPr>
+                <a:t>N</a:t>
+              </a:r>
+              <a:r>
+                <a:rPr lang="zh-TW" altLang="en-US" b="1" kern="2200" dirty="0">
+                  <a:gradFill flip="none" rotWithShape="1">
+                    <a:gsLst>
+                      <a:gs pos="0">
+                        <a:srgbClr val="0070C0">
+                          <a:shade val="30000"/>
+                          <a:satMod val="115000"/>
+                        </a:srgbClr>
+                      </a:gs>
+                      <a:gs pos="44000">
+                        <a:srgbClr val="0070C0">
+                          <a:shade val="67500"/>
+                          <a:satMod val="115000"/>
+                        </a:srgbClr>
+                      </a:gs>
+                      <a:gs pos="75000">
+                        <a:srgbClr val="00B0F0"/>
+                      </a:gs>
+                      <a:gs pos="56000">
+                        <a:srgbClr val="0070C0">
+                          <a:shade val="100000"/>
+                          <a:satMod val="115000"/>
+                        </a:srgbClr>
+                      </a:gs>
+                    </a:gsLst>
+                    <a:lin ang="18000000" scaled="0"/>
+                    <a:tileRect/>
+                  </a:gradFill>
+                  <a:latin typeface="+mj-lt"/>
+                  <a:ea typeface="Microsoft JhengHei" panose="020B0604030504040204" pitchFamily="34" charset="-120"/>
+                </a:rPr>
+                <a:t>組四個</a:t>
+              </a:r>
+              <a:r>
+                <a:rPr lang="en-US" altLang="zh-CN" b="1" kern="2200" dirty="0">
+                  <a:gradFill flip="none" rotWithShape="1">
+                    <a:gsLst>
+                      <a:gs pos="0">
+                        <a:srgbClr val="0070C0">
+                          <a:shade val="30000"/>
+                          <a:satMod val="115000"/>
+                        </a:srgbClr>
+                      </a:gs>
+                      <a:gs pos="44000">
+                        <a:srgbClr val="0070C0">
+                          <a:shade val="67500"/>
+                          <a:satMod val="115000"/>
+                        </a:srgbClr>
+                      </a:gs>
+                      <a:gs pos="75000">
+                        <a:srgbClr val="00B0F0"/>
+                      </a:gs>
+                      <a:gs pos="56000">
+                        <a:srgbClr val="0070C0">
+                          <a:shade val="100000"/>
+                          <a:satMod val="115000"/>
+                        </a:srgbClr>
+                      </a:gs>
+                    </a:gsLst>
+                    <a:lin ang="18000000" scaled="0"/>
+                    <a:tileRect/>
+                  </a:gradFill>
+                  <a:latin typeface="+mj-lt"/>
+                  <a:ea typeface="Microsoft JhengHei" panose="020B0604030504040204" pitchFamily="34" charset="-120"/>
+                </a:rPr>
+                <a:t>LED</a:t>
+              </a:r>
+              <a:r>
+                <a:rPr lang="zh-TW" altLang="en-US" b="1" kern="2200" dirty="0">
+                  <a:gradFill flip="none" rotWithShape="1">
+                    <a:gsLst>
+                      <a:gs pos="0">
+                        <a:srgbClr val="0070C0">
+                          <a:shade val="30000"/>
+                          <a:satMod val="115000"/>
+                        </a:srgbClr>
+                      </a:gs>
+                      <a:gs pos="44000">
+                        <a:srgbClr val="0070C0">
+                          <a:shade val="67500"/>
+                          <a:satMod val="115000"/>
+                        </a:srgbClr>
+                      </a:gs>
+                      <a:gs pos="75000">
+                        <a:srgbClr val="00B0F0"/>
+                      </a:gs>
+                      <a:gs pos="56000">
+                        <a:srgbClr val="0070C0">
+                          <a:shade val="100000"/>
+                          <a:satMod val="115000"/>
+                        </a:srgbClr>
+                      </a:gs>
+                    </a:gsLst>
+                    <a:lin ang="18000000" scaled="0"/>
+                    <a:tileRect/>
+                  </a:gradFill>
+                  <a:latin typeface="+mj-lt"/>
+                  <a:ea typeface="Microsoft JhengHei" panose="020B0604030504040204" pitchFamily="34" charset="-120"/>
+                </a:rPr>
+                <a:t>燈  </a:t>
+              </a:r>
+              <a:r>
+                <a:rPr lang="en-US" altLang="zh-TW" b="1" kern="2200" dirty="0">
+                  <a:gradFill flip="none" rotWithShape="1">
+                    <a:gsLst>
+                      <a:gs pos="0">
+                        <a:srgbClr val="0070C0">
+                          <a:shade val="30000"/>
+                          <a:satMod val="115000"/>
+                        </a:srgbClr>
+                      </a:gs>
+                      <a:gs pos="44000">
+                        <a:srgbClr val="0070C0">
+                          <a:shade val="67500"/>
+                          <a:satMod val="115000"/>
+                        </a:srgbClr>
+                      </a:gs>
+                      <a:gs pos="75000">
+                        <a:srgbClr val="00B0F0"/>
+                      </a:gs>
+                      <a:gs pos="56000">
+                        <a:srgbClr val="0070C0">
+                          <a:shade val="100000"/>
+                          <a:satMod val="115000"/>
+                        </a:srgbClr>
+                      </a:gs>
+                    </a:gsLst>
+                    <a:lin ang="18000000" scaled="0"/>
+                    <a:tileRect/>
+                  </a:gradFill>
+                  <a:latin typeface="+mj-lt"/>
+                  <a:ea typeface="Microsoft JhengHei" panose="020B0604030504040204" pitchFamily="34" charset="-120"/>
+                </a:rPr>
+                <a:t>(</a:t>
+              </a:r>
+              <a:r>
+                <a:rPr lang="zh-TW" altLang="en-US" b="1" kern="2200" dirty="0">
+                  <a:gradFill flip="none" rotWithShape="1">
+                    <a:gsLst>
+                      <a:gs pos="0">
+                        <a:srgbClr val="0070C0">
+                          <a:shade val="30000"/>
+                          <a:satMod val="115000"/>
+                        </a:srgbClr>
+                      </a:gs>
+                      <a:gs pos="44000">
+                        <a:srgbClr val="0070C0">
+                          <a:shade val="67500"/>
+                          <a:satMod val="115000"/>
+                        </a:srgbClr>
+                      </a:gs>
+                      <a:gs pos="75000">
+                        <a:srgbClr val="00B0F0"/>
+                      </a:gs>
+                      <a:gs pos="56000">
+                        <a:srgbClr val="0070C0">
+                          <a:shade val="100000"/>
+                          <a:satMod val="115000"/>
+                        </a:srgbClr>
+                      </a:gs>
+                    </a:gsLst>
+                    <a:lin ang="18000000" scaled="0"/>
+                    <a:tileRect/>
+                  </a:gradFill>
+                  <a:latin typeface="+mj-lt"/>
+                  <a:ea typeface="Microsoft JhengHei" panose="020B0604030504040204" pitchFamily="34" charset="-120"/>
+                </a:rPr>
+                <a:t>搭配</a:t>
+              </a:r>
+              <a:r>
+                <a:rPr lang="en-US" altLang="zh-CN" b="1" kern="2200" dirty="0">
+                  <a:gradFill flip="none" rotWithShape="1">
+                    <a:gsLst>
+                      <a:gs pos="0">
+                        <a:srgbClr val="0070C0">
+                          <a:shade val="30000"/>
+                          <a:satMod val="115000"/>
+                        </a:srgbClr>
+                      </a:gs>
+                      <a:gs pos="44000">
+                        <a:srgbClr val="0070C0">
+                          <a:shade val="67500"/>
+                          <a:satMod val="115000"/>
+                        </a:srgbClr>
+                      </a:gs>
+                      <a:gs pos="75000">
+                        <a:srgbClr val="00B0F0"/>
+                      </a:gs>
+                      <a:gs pos="56000">
+                        <a:srgbClr val="0070C0">
+                          <a:shade val="100000"/>
+                          <a:satMod val="115000"/>
+                        </a:srgbClr>
+                      </a:gs>
+                    </a:gsLst>
+                    <a:lin ang="18000000" scaled="0"/>
+                    <a:tileRect/>
+                  </a:gradFill>
+                  <a:latin typeface="+mj-lt"/>
+                  <a:ea typeface="Microsoft JhengHei" panose="020B0604030504040204" pitchFamily="34" charset="-120"/>
+                </a:rPr>
+                <a:t>WB2812 </a:t>
+              </a:r>
+              <a:r>
+                <a:rPr lang="zh-TW" altLang="en-US" b="1" kern="2200" dirty="0">
+                  <a:gradFill flip="none" rotWithShape="1">
+                    <a:gsLst>
+                      <a:gs pos="0">
+                        <a:srgbClr val="0070C0">
+                          <a:shade val="30000"/>
+                          <a:satMod val="115000"/>
+                        </a:srgbClr>
+                      </a:gs>
+                      <a:gs pos="44000">
+                        <a:srgbClr val="0070C0">
+                          <a:shade val="67500"/>
+                          <a:satMod val="115000"/>
+                        </a:srgbClr>
+                      </a:gs>
+                      <a:gs pos="75000">
+                        <a:srgbClr val="00B0F0"/>
+                      </a:gs>
+                      <a:gs pos="56000">
+                        <a:srgbClr val="0070C0">
+                          <a:shade val="100000"/>
+                          <a:satMod val="115000"/>
+                        </a:srgbClr>
+                      </a:gs>
+                    </a:gsLst>
+                    <a:lin ang="18000000" scaled="0"/>
+                    <a:tileRect/>
+                  </a:gradFill>
+                  <a:latin typeface="+mj-lt"/>
+                  <a:ea typeface="Microsoft JhengHei" panose="020B0604030504040204" pitchFamily="34" charset="-120"/>
+                </a:rPr>
+                <a:t>晶片</a:t>
+              </a:r>
+              <a:r>
+                <a:rPr lang="en-US" altLang="zh-CN" b="1" kern="2200" dirty="0">
+                  <a:gradFill flip="none" rotWithShape="1">
+                    <a:gsLst>
+                      <a:gs pos="0">
+                        <a:srgbClr val="0070C0">
+                          <a:shade val="30000"/>
+                          <a:satMod val="115000"/>
+                        </a:srgbClr>
+                      </a:gs>
+                      <a:gs pos="44000">
+                        <a:srgbClr val="0070C0">
+                          <a:shade val="67500"/>
+                          <a:satMod val="115000"/>
+                        </a:srgbClr>
+                      </a:gs>
+                      <a:gs pos="75000">
+                        <a:srgbClr val="00B0F0"/>
+                      </a:gs>
+                      <a:gs pos="56000">
+                        <a:srgbClr val="0070C0">
+                          <a:shade val="100000"/>
+                          <a:satMod val="115000"/>
+                        </a:srgbClr>
+                      </a:gs>
+                    </a:gsLst>
+                    <a:lin ang="18000000" scaled="0"/>
+                    <a:tileRect/>
+                  </a:gradFill>
+                  <a:latin typeface="+mj-lt"/>
+                  <a:ea typeface="Microsoft JhengHei" panose="020B0604030504040204" pitchFamily="34" charset="-120"/>
+                </a:rPr>
+                <a:t>LED</a:t>
+              </a:r>
+              <a:r>
+                <a:rPr lang="zh-TW" altLang="en-US" b="1" kern="2200" dirty="0">
+                  <a:gradFill flip="none" rotWithShape="1">
+                    <a:gsLst>
+                      <a:gs pos="0">
+                        <a:srgbClr val="0070C0">
+                          <a:shade val="30000"/>
+                          <a:satMod val="115000"/>
+                        </a:srgbClr>
+                      </a:gs>
+                      <a:gs pos="44000">
+                        <a:srgbClr val="0070C0">
+                          <a:shade val="67500"/>
+                          <a:satMod val="115000"/>
+                        </a:srgbClr>
+                      </a:gs>
+                      <a:gs pos="75000">
+                        <a:srgbClr val="00B0F0"/>
+                      </a:gs>
+                      <a:gs pos="56000">
+                        <a:srgbClr val="0070C0">
+                          <a:shade val="100000"/>
+                          <a:satMod val="115000"/>
+                        </a:srgbClr>
+                      </a:gs>
+                    </a:gsLst>
+                    <a:lin ang="18000000" scaled="0"/>
+                    <a:tileRect/>
+                  </a:gradFill>
+                  <a:latin typeface="+mj-lt"/>
+                  <a:ea typeface="Microsoft JhengHei" panose="020B0604030504040204" pitchFamily="34" charset="-120"/>
+                </a:rPr>
+                <a:t>燈使用</a:t>
+              </a:r>
+              <a:r>
+                <a:rPr lang="en-US" altLang="zh-TW" b="1" kern="2200" dirty="0">
+                  <a:gradFill flip="none" rotWithShape="1">
+                    <a:gsLst>
+                      <a:gs pos="0">
+                        <a:srgbClr val="0070C0">
+                          <a:shade val="30000"/>
+                          <a:satMod val="115000"/>
+                        </a:srgbClr>
+                      </a:gs>
+                      <a:gs pos="44000">
+                        <a:srgbClr val="0070C0">
+                          <a:shade val="67500"/>
+                          <a:satMod val="115000"/>
+                        </a:srgbClr>
+                      </a:gs>
+                      <a:gs pos="75000">
+                        <a:srgbClr val="00B0F0"/>
+                      </a:gs>
+                      <a:gs pos="56000">
+                        <a:srgbClr val="0070C0">
+                          <a:shade val="100000"/>
+                          <a:satMod val="115000"/>
+                        </a:srgbClr>
+                      </a:gs>
+                    </a:gsLst>
+                    <a:lin ang="18000000" scaled="0"/>
+                    <a:tileRect/>
+                  </a:gradFill>
+                  <a:latin typeface="+mj-lt"/>
+                  <a:ea typeface="Microsoft JhengHei" panose="020B0604030504040204" pitchFamily="34" charset="-120"/>
+                </a:rPr>
+                <a:t>)</a:t>
+              </a:r>
+              <a:endParaRPr lang="en-US" altLang="zh-TW" b="1" kern="2200" dirty="0">
+                <a:solidFill>
+                  <a:schemeClr val="accent2">
+                    <a:lumMod val="75000"/>
+                  </a:schemeClr>
+                </a:solidFill>
+                <a:latin typeface="+mj-lt"/>
+                <a:ea typeface="Microsoft JhengHei" panose="020B0604030504040204" pitchFamily="34" charset="-120"/>
+              </a:endParaRPr>
+            </a:p>
+          </p:txBody>
+        </p:sp>
+      </p:grpSp>
+      <p:sp>
+        <p:nvSpPr>
+          <p:cNvPr id="8" name="文字方塊 7">
+            <a:extLst>
+              <a:ext uri="{FF2B5EF4-FFF2-40B4-BE49-F238E27FC236}">
+                <a16:creationId xmlns:a16="http://schemas.microsoft.com/office/drawing/2014/main" id="{67AD1C90-C89A-5E01-9461-38B1DD0F9BCD}"/>
+              </a:ext>
+            </a:extLst>
+          </p:cNvPr>
+          <p:cNvSpPr txBox="1"/>
+          <p:nvPr/>
+        </p:nvSpPr>
+        <p:spPr>
+          <a:xfrm>
+            <a:off x="1340261" y="1956411"/>
+            <a:ext cx="9278753" cy="4196405"/>
+          </a:xfrm>
+          <a:prstGeom prst="rect">
+            <a:avLst/>
+          </a:prstGeom>
+          <a:noFill/>
+        </p:spPr>
+        <p:txBody>
+          <a:bodyPr wrap="square" rtlCol="0">
+            <a:spAutoFit/>
+          </a:bodyPr>
+          <a:lstStyle/>
+          <a:p>
+            <a:pPr>
+              <a:lnSpc>
+                <a:spcPct val="150000"/>
+              </a:lnSpc>
+            </a:pPr>
+            <a:r>
+              <a:rPr lang="zh-TW" altLang="en-US" dirty="0">
+                <a:latin typeface="Microsoft JhengHei" panose="020B0604030504040204" pitchFamily="34" charset="-120"/>
+                <a:ea typeface="Microsoft JhengHei" panose="020B0604030504040204" pitchFamily="34" charset="-120"/>
+              </a:rPr>
+              <a:t>每顆</a:t>
+            </a:r>
+            <a:r>
+              <a:rPr lang="en-US" altLang="zh-TW" dirty="0">
+                <a:latin typeface="Microsoft JhengHei" panose="020B0604030504040204" pitchFamily="34" charset="-120"/>
+                <a:ea typeface="Microsoft JhengHei" panose="020B0604030504040204" pitchFamily="34" charset="-120"/>
+              </a:rPr>
+              <a:t>LED</a:t>
+            </a:r>
+            <a:r>
+              <a:rPr lang="zh-TW" altLang="en-US" dirty="0">
+                <a:latin typeface="Microsoft JhengHei" panose="020B0604030504040204" pitchFamily="34" charset="-120"/>
+                <a:ea typeface="Microsoft JhengHei" panose="020B0604030504040204" pitchFamily="34" charset="-120"/>
+              </a:rPr>
+              <a:t>燈都以</a:t>
+            </a:r>
+            <a:r>
+              <a:rPr lang="en-US" altLang="zh-TW" dirty="0">
+                <a:latin typeface="Microsoft JhengHei" panose="020B0604030504040204" pitchFamily="34" charset="-120"/>
+                <a:ea typeface="Microsoft JhengHei" panose="020B0604030504040204" pitchFamily="34" charset="-120"/>
+              </a:rPr>
+              <a:t>RGBM</a:t>
+            </a:r>
+            <a:r>
+              <a:rPr lang="zh-TW" altLang="en-US" dirty="0">
+                <a:latin typeface="Microsoft JhengHei" panose="020B0604030504040204" pitchFamily="34" charset="-120"/>
+                <a:ea typeface="Microsoft JhengHei" panose="020B0604030504040204" pitchFamily="34" charset="-120"/>
+              </a:rPr>
+              <a:t>四個變數表示，分別是</a:t>
+            </a:r>
+            <a:endParaRPr lang="en-US" altLang="zh-TW" dirty="0">
+              <a:latin typeface="Microsoft JhengHei" panose="020B0604030504040204" pitchFamily="34" charset="-120"/>
+              <a:ea typeface="Microsoft JhengHei" panose="020B0604030504040204" pitchFamily="34" charset="-120"/>
+            </a:endParaRPr>
+          </a:p>
+          <a:p>
+            <a:pPr>
+              <a:lnSpc>
+                <a:spcPct val="150000"/>
+              </a:lnSpc>
+            </a:pPr>
+            <a:r>
+              <a:rPr lang="en-US" altLang="zh-TW" dirty="0">
+                <a:latin typeface="Microsoft JhengHei" panose="020B0604030504040204" pitchFamily="34" charset="-120"/>
+                <a:ea typeface="Microsoft JhengHei" panose="020B0604030504040204" pitchFamily="34" charset="-120"/>
+              </a:rPr>
+              <a:t>R: </a:t>
+            </a:r>
+            <a:r>
+              <a:rPr lang="zh-TW" altLang="en-US" dirty="0">
+                <a:latin typeface="Microsoft JhengHei" panose="020B0604030504040204" pitchFamily="34" charset="-120"/>
+                <a:ea typeface="Microsoft JhengHei" panose="020B0604030504040204" pitchFamily="34" charset="-120"/>
+              </a:rPr>
+              <a:t>紅色  以</a:t>
+            </a:r>
+            <a:r>
+              <a:rPr lang="en-US" altLang="zh-TW" dirty="0">
+                <a:latin typeface="Microsoft JhengHei" panose="020B0604030504040204" pitchFamily="34" charset="-120"/>
+                <a:ea typeface="Microsoft JhengHei" panose="020B0604030504040204" pitchFamily="34" charset="-120"/>
+              </a:rPr>
+              <a:t>0-F</a:t>
+            </a:r>
+            <a:r>
+              <a:rPr lang="zh-TW" altLang="en-US" dirty="0">
+                <a:latin typeface="Microsoft JhengHei" panose="020B0604030504040204" pitchFamily="34" charset="-120"/>
+                <a:ea typeface="Microsoft JhengHei" panose="020B0604030504040204" pitchFamily="34" charset="-120"/>
+              </a:rPr>
+              <a:t>表示 </a:t>
+            </a:r>
+          </a:p>
+          <a:p>
+            <a:pPr>
+              <a:lnSpc>
+                <a:spcPct val="150000"/>
+              </a:lnSpc>
+            </a:pPr>
+            <a:r>
+              <a:rPr lang="en-US" altLang="zh-TW" dirty="0">
+                <a:latin typeface="Microsoft JhengHei" panose="020B0604030504040204" pitchFamily="34" charset="-120"/>
+                <a:ea typeface="Microsoft JhengHei" panose="020B0604030504040204" pitchFamily="34" charset="-120"/>
+              </a:rPr>
+              <a:t>G: </a:t>
+            </a:r>
+            <a:r>
+              <a:rPr lang="zh-TW" altLang="en-US" dirty="0">
+                <a:latin typeface="Microsoft JhengHei" panose="020B0604030504040204" pitchFamily="34" charset="-120"/>
+                <a:ea typeface="Microsoft JhengHei" panose="020B0604030504040204" pitchFamily="34" charset="-120"/>
+              </a:rPr>
+              <a:t>綠色  以</a:t>
+            </a:r>
+            <a:r>
+              <a:rPr lang="en-US" altLang="zh-TW" dirty="0">
+                <a:latin typeface="Microsoft JhengHei" panose="020B0604030504040204" pitchFamily="34" charset="-120"/>
+                <a:ea typeface="Microsoft JhengHei" panose="020B0604030504040204" pitchFamily="34" charset="-120"/>
+              </a:rPr>
+              <a:t>0-F</a:t>
+            </a:r>
+            <a:r>
+              <a:rPr lang="zh-TW" altLang="en-US" dirty="0">
+                <a:latin typeface="Microsoft JhengHei" panose="020B0604030504040204" pitchFamily="34" charset="-120"/>
+                <a:ea typeface="Microsoft JhengHei" panose="020B0604030504040204" pitchFamily="34" charset="-120"/>
+              </a:rPr>
+              <a:t>表示 </a:t>
+            </a:r>
+          </a:p>
+          <a:p>
+            <a:pPr>
+              <a:lnSpc>
+                <a:spcPct val="150000"/>
+              </a:lnSpc>
+            </a:pPr>
+            <a:r>
+              <a:rPr lang="en-US" altLang="zh-TW" dirty="0">
+                <a:latin typeface="Microsoft JhengHei" panose="020B0604030504040204" pitchFamily="34" charset="-120"/>
+                <a:ea typeface="Microsoft JhengHei" panose="020B0604030504040204" pitchFamily="34" charset="-120"/>
+              </a:rPr>
+              <a:t>B. </a:t>
+            </a:r>
+            <a:r>
+              <a:rPr lang="zh-TW" altLang="en-US" dirty="0">
+                <a:latin typeface="Microsoft JhengHei" panose="020B0604030504040204" pitchFamily="34" charset="-120"/>
+                <a:ea typeface="Microsoft JhengHei" panose="020B0604030504040204" pitchFamily="34" charset="-120"/>
+              </a:rPr>
+              <a:t>藍色  以</a:t>
+            </a:r>
+            <a:r>
+              <a:rPr lang="en-US" altLang="zh-TW" dirty="0">
+                <a:latin typeface="Microsoft JhengHei" panose="020B0604030504040204" pitchFamily="34" charset="-120"/>
+                <a:ea typeface="Microsoft JhengHei" panose="020B0604030504040204" pitchFamily="34" charset="-120"/>
+              </a:rPr>
+              <a:t>0-F</a:t>
+            </a:r>
+            <a:r>
+              <a:rPr lang="zh-TW" altLang="en-US" dirty="0">
+                <a:latin typeface="Microsoft JhengHei" panose="020B0604030504040204" pitchFamily="34" charset="-120"/>
+                <a:ea typeface="Microsoft JhengHei" panose="020B0604030504040204" pitchFamily="34" charset="-120"/>
+              </a:rPr>
+              <a:t>表示 </a:t>
+            </a:r>
+          </a:p>
+          <a:p>
+            <a:pPr>
+              <a:lnSpc>
+                <a:spcPct val="150000"/>
+              </a:lnSpc>
+            </a:pPr>
+            <a:r>
+              <a:rPr lang="en-US" altLang="zh-TW" dirty="0">
+                <a:latin typeface="Microsoft JhengHei" panose="020B0604030504040204" pitchFamily="34" charset="-120"/>
+                <a:ea typeface="Microsoft JhengHei" panose="020B0604030504040204" pitchFamily="34" charset="-120"/>
+              </a:rPr>
+              <a:t>M: </a:t>
+            </a:r>
+            <a:r>
+              <a:rPr lang="zh-TW" altLang="en-US" dirty="0">
+                <a:latin typeface="Microsoft JhengHei" panose="020B0604030504040204" pitchFamily="34" charset="-120"/>
+                <a:ea typeface="Microsoft JhengHei" panose="020B0604030504040204" pitchFamily="34" charset="-120"/>
+              </a:rPr>
+              <a:t>表示 閃爍的動作，目前以每秒為單位</a:t>
+            </a:r>
+            <a:r>
+              <a:rPr lang="en-US" altLang="zh-TW" dirty="0">
+                <a:latin typeface="Microsoft JhengHei" panose="020B0604030504040204" pitchFamily="34" charset="-120"/>
+                <a:ea typeface="Microsoft JhengHei" panose="020B0604030504040204" pitchFamily="34" charset="-120"/>
+              </a:rPr>
+              <a:t>, 0 </a:t>
+            </a:r>
+            <a:r>
+              <a:rPr lang="zh-TW" altLang="en-US" dirty="0">
+                <a:latin typeface="Microsoft JhengHei" panose="020B0604030504040204" pitchFamily="34" charset="-120"/>
+                <a:ea typeface="Microsoft JhengHei" panose="020B0604030504040204" pitchFamily="34" charset="-120"/>
+              </a:rPr>
+              <a:t>表示不亮，</a:t>
+            </a:r>
+            <a:r>
+              <a:rPr lang="en-US" altLang="zh-TW" dirty="0">
+                <a:latin typeface="Microsoft JhengHei" panose="020B0604030504040204" pitchFamily="34" charset="-120"/>
+                <a:ea typeface="Microsoft JhengHei" panose="020B0604030504040204" pitchFamily="34" charset="-120"/>
+              </a:rPr>
+              <a:t>1</a:t>
+            </a:r>
+            <a:r>
+              <a:rPr lang="zh-TW" altLang="en-US" dirty="0">
+                <a:latin typeface="Microsoft JhengHei" panose="020B0604030504040204" pitchFamily="34" charset="-120"/>
+                <a:ea typeface="Microsoft JhengHei" panose="020B0604030504040204" pitchFamily="34" charset="-120"/>
+              </a:rPr>
+              <a:t>表示每秒有</a:t>
+            </a:r>
+            <a:r>
+              <a:rPr lang="en-US" altLang="zh-TW" dirty="0">
+                <a:latin typeface="Microsoft JhengHei" panose="020B0604030504040204" pitchFamily="34" charset="-120"/>
+                <a:ea typeface="Microsoft JhengHei" panose="020B0604030504040204" pitchFamily="34" charset="-120"/>
+              </a:rPr>
+              <a:t>100ms</a:t>
+            </a:r>
+            <a:r>
+              <a:rPr lang="zh-TW" altLang="en-US" dirty="0">
+                <a:latin typeface="Microsoft JhengHei" panose="020B0604030504040204" pitchFamily="34" charset="-120"/>
+                <a:ea typeface="Microsoft JhengHei" panose="020B0604030504040204" pitchFamily="34" charset="-120"/>
+              </a:rPr>
+              <a:t>會亮，以此類推。如果是</a:t>
+            </a:r>
+            <a:r>
+              <a:rPr lang="en-US" altLang="zh-TW" dirty="0">
+                <a:latin typeface="Microsoft JhengHei" panose="020B0604030504040204" pitchFamily="34" charset="-120"/>
+                <a:ea typeface="Microsoft JhengHei" panose="020B0604030504040204" pitchFamily="34" charset="-120"/>
+              </a:rPr>
+              <a:t>A</a:t>
+            </a:r>
+            <a:r>
+              <a:rPr lang="zh-TW" altLang="en-US" dirty="0">
+                <a:latin typeface="Microsoft JhengHei" panose="020B0604030504040204" pitchFamily="34" charset="-120"/>
+                <a:ea typeface="Microsoft JhengHei" panose="020B0604030504040204" pitchFamily="34" charset="-120"/>
+              </a:rPr>
+              <a:t>以上，表示恆亮</a:t>
+            </a:r>
+          </a:p>
+          <a:p>
+            <a:pPr>
+              <a:lnSpc>
+                <a:spcPct val="150000"/>
+              </a:lnSpc>
+            </a:pPr>
+            <a:endParaRPr lang="zh-TW" altLang="en-US" dirty="0">
+              <a:latin typeface="Microsoft JhengHei" panose="020B0604030504040204" pitchFamily="34" charset="-120"/>
+              <a:ea typeface="Microsoft JhengHei" panose="020B0604030504040204" pitchFamily="34" charset="-120"/>
+            </a:endParaRPr>
+          </a:p>
+          <a:p>
+            <a:pPr>
+              <a:lnSpc>
+                <a:spcPct val="150000"/>
+              </a:lnSpc>
+            </a:pPr>
+            <a:r>
+              <a:rPr lang="zh-TW" altLang="en-US" dirty="0">
+                <a:latin typeface="Microsoft JhengHei" panose="020B0604030504040204" pitchFamily="34" charset="-120"/>
+                <a:ea typeface="Microsoft JhengHei" panose="020B0604030504040204" pitchFamily="34" charset="-120"/>
+              </a:rPr>
+              <a:t>    例如： </a:t>
+            </a:r>
+            <a:r>
+              <a:rPr lang="en-US" altLang="zh-TW" dirty="0">
+                <a:latin typeface="Microsoft JhengHei" panose="020B0604030504040204" pitchFamily="34" charset="-120"/>
+                <a:ea typeface="Microsoft JhengHei" panose="020B0604030504040204" pitchFamily="34" charset="-120"/>
+              </a:rPr>
+              <a:t>F00A  </a:t>
+            </a:r>
+            <a:r>
+              <a:rPr lang="zh-TW" altLang="en-US" dirty="0">
+                <a:latin typeface="Microsoft JhengHei" panose="020B0604030504040204" pitchFamily="34" charset="-120"/>
+                <a:ea typeface="Microsoft JhengHei" panose="020B0604030504040204" pitchFamily="34" charset="-120"/>
+              </a:rPr>
+              <a:t>表示紅燈恆亮，</a:t>
+            </a:r>
+            <a:r>
+              <a:rPr lang="en-US" altLang="zh-TW" dirty="0">
+                <a:latin typeface="Microsoft JhengHei" panose="020B0604030504040204" pitchFamily="34" charset="-120"/>
+                <a:ea typeface="Microsoft JhengHei" panose="020B0604030504040204" pitchFamily="34" charset="-120"/>
+              </a:rPr>
+              <a:t>FFF5 </a:t>
+            </a:r>
+            <a:r>
+              <a:rPr lang="zh-TW" altLang="en-US" dirty="0">
+                <a:latin typeface="Microsoft JhengHei" panose="020B0604030504040204" pitchFamily="34" charset="-120"/>
+                <a:ea typeface="Microsoft JhengHei" panose="020B0604030504040204" pitchFamily="34" charset="-120"/>
+              </a:rPr>
+              <a:t>表示白燈每秒有</a:t>
+            </a:r>
+            <a:r>
+              <a:rPr lang="en-US" altLang="zh-TW" dirty="0">
+                <a:latin typeface="Microsoft JhengHei" panose="020B0604030504040204" pitchFamily="34" charset="-120"/>
+                <a:ea typeface="Microsoft JhengHei" panose="020B0604030504040204" pitchFamily="34" charset="-120"/>
+              </a:rPr>
+              <a:t>500ms</a:t>
+            </a:r>
+            <a:r>
+              <a:rPr lang="zh-TW" altLang="en-US" dirty="0">
+                <a:latin typeface="Microsoft JhengHei" panose="020B0604030504040204" pitchFamily="34" charset="-120"/>
+                <a:ea typeface="Microsoft JhengHei" panose="020B0604030504040204" pitchFamily="34" charset="-120"/>
+              </a:rPr>
+              <a:t>會亮，</a:t>
+            </a:r>
+            <a:r>
+              <a:rPr lang="en-US" altLang="zh-TW" dirty="0">
+                <a:latin typeface="Microsoft JhengHei" panose="020B0604030504040204" pitchFamily="34" charset="-120"/>
+                <a:ea typeface="Microsoft JhengHei" panose="020B0604030504040204" pitchFamily="34" charset="-120"/>
+              </a:rPr>
+              <a:t>500ms</a:t>
+            </a:r>
+            <a:r>
+              <a:rPr lang="zh-TW" altLang="en-US" dirty="0">
+                <a:latin typeface="Microsoft JhengHei" panose="020B0604030504040204" pitchFamily="34" charset="-120"/>
+                <a:ea typeface="Microsoft JhengHei" panose="020B0604030504040204" pitchFamily="34" charset="-120"/>
+              </a:rPr>
+              <a:t>不亮</a:t>
+            </a:r>
+          </a:p>
+          <a:p>
+            <a:pPr>
+              <a:lnSpc>
+                <a:spcPct val="150000"/>
+              </a:lnSpc>
+            </a:pPr>
+            <a:endParaRPr lang="zh-TW" altLang="en-US" dirty="0">
+              <a:latin typeface="Microsoft JhengHei" panose="020B0604030504040204" pitchFamily="34" charset="-120"/>
+              <a:ea typeface="Microsoft JhengHei" panose="020B0604030504040204" pitchFamily="34" charset="-120"/>
+            </a:endParaRPr>
+          </a:p>
+          <a:p>
+            <a:pPr>
+              <a:lnSpc>
+                <a:spcPct val="150000"/>
+              </a:lnSpc>
+            </a:pPr>
+            <a:r>
+              <a:rPr lang="zh-CN" altLang="en-US" dirty="0">
+                <a:latin typeface="Microsoft JhengHei" panose="020B0604030504040204" pitchFamily="34" charset="-120"/>
+                <a:ea typeface="Microsoft JhengHei" panose="020B0604030504040204" pitchFamily="34" charset="-120"/>
+              </a:rPr>
+              <a:t>命令範例：</a:t>
+            </a:r>
+            <a:r>
+              <a:rPr lang="en-US" altLang="zh-TW" dirty="0">
+                <a:latin typeface="Microsoft JhengHei" panose="020B0604030504040204" pitchFamily="34" charset="-120"/>
+                <a:ea typeface="Microsoft JhengHei" panose="020B0604030504040204" pitchFamily="34" charset="-120"/>
+              </a:rPr>
+              <a:t>LE50111100000111110000022222#	-&gt; </a:t>
+            </a:r>
+            <a:r>
+              <a:rPr lang="zh-TW" altLang="en-US" dirty="0">
+                <a:latin typeface="Microsoft JhengHei" panose="020B0604030504040204" pitchFamily="34" charset="-120"/>
+                <a:ea typeface="Microsoft JhengHei" panose="020B0604030504040204" pitchFamily="34" charset="-120"/>
+              </a:rPr>
+              <a:t>代表第五組的</a:t>
+            </a:r>
+            <a:r>
+              <a:rPr lang="en-US" altLang="zh-TW" dirty="0">
+                <a:latin typeface="Microsoft JhengHei" panose="020B0604030504040204" pitchFamily="34" charset="-120"/>
+                <a:ea typeface="Microsoft JhengHei" panose="020B0604030504040204" pitchFamily="34" charset="-120"/>
+              </a:rPr>
+              <a:t>LED</a:t>
+            </a:r>
+            <a:endParaRPr kumimoji="1" lang="zh-TW" altLang="en-US" dirty="0">
+              <a:latin typeface="Microsoft JhengHei" panose="020B0604030504040204" pitchFamily="34" charset="-120"/>
+              <a:ea typeface="Microsoft JhengHei" panose="020B0604030504040204" pitchFamily="34" charset="-120"/>
+            </a:endParaRPr>
+          </a:p>
+        </p:txBody>
+      </p:sp>
+    </p:spTree>
+    <p:extLst>
+      <p:ext uri="{BB962C8B-B14F-4D97-AF65-F5344CB8AC3E}">
+        <p14:creationId xmlns:p14="http://schemas.microsoft.com/office/powerpoint/2010/main" val="2298565583"/>
+      </p:ext>
+    </p:extLst>
+  </p:cSld>
+  <p:clrMapOvr>
+    <a:masterClrMapping/>
+  </p:clrMapOvr>
+  <p:timing>
+    <p:tnLst>
+      <p:par>
+        <p:cTn id="1" dur="indefinite" restart="never" nodeType="tmRoot">
+          <p:childTnLst>
+            <p:seq concurrent="1" nextAc="seek">
+              <p:cTn id="2" dur="indefinite" nodeType="mainSeq">
+                <p:childTnLst>
+                  <p:par>
+                    <p:cTn id="3" fill="hold">
+                      <p:stCondLst>
+                        <p:cond delay="indefinite"/>
+                        <p:cond evt="onBegin" delay="0">
+                          <p:tn val="2"/>
+                        </p:cond>
+                      </p:stCondLst>
+                      <p:childTnLst>
+                        <p:par>
+                          <p:cTn id="4" fill="hold">
+                            <p:stCondLst>
+                              <p:cond delay="0"/>
+                            </p:stCondLst>
+                            <p:childTnLst>
+                              <p:par>
+                                <p:cTn id="5" presetID="2" presetClass="entr" presetSubtype="4" fill="hold" grpId="0" nodeType="afterEffect">
+                                  <p:stCondLst>
+                                    <p:cond delay="0"/>
+                                  </p:stCondLst>
+                                  <p:iterate type="lt">
+                                    <p:tmPct val="10000"/>
+                                  </p:iterate>
+                                  <p:childTnLst>
+                                    <p:set>
+                                      <p:cBhvr>
+                                        <p:cTn id="6" dur="1" fill="hold">
+                                          <p:stCondLst>
+                                            <p:cond delay="0"/>
+                                          </p:stCondLst>
+                                        </p:cTn>
+                                        <p:tgtEl>
+                                          <p:spTgt spid="18"/>
+                                        </p:tgtEl>
+                                        <p:attrNameLst>
+                                          <p:attrName>style.visibility</p:attrName>
+                                        </p:attrNameLst>
+                                      </p:cBhvr>
+                                      <p:to>
+                                        <p:strVal val="visible"/>
+                                      </p:to>
+                                    </p:set>
+                                    <p:anim calcmode="lin" valueType="num">
+                                      <p:cBhvr additive="base">
+                                        <p:cTn id="7" dur="500" fill="hold"/>
+                                        <p:tgtEl>
+                                          <p:spTgt spid="18"/>
+                                        </p:tgtEl>
+                                        <p:attrNameLst>
+                                          <p:attrName>ppt_x</p:attrName>
+                                        </p:attrNameLst>
+                                      </p:cBhvr>
+                                      <p:tavLst>
+                                        <p:tav tm="0">
+                                          <p:val>
+                                            <p:strVal val="#ppt_x"/>
+                                          </p:val>
+                                        </p:tav>
+                                        <p:tav tm="100000">
+                                          <p:val>
+                                            <p:strVal val="#ppt_x"/>
+                                          </p:val>
+                                        </p:tav>
+                                      </p:tavLst>
+                                    </p:anim>
+                                    <p:anim calcmode="lin" valueType="num">
+                                      <p:cBhvr additive="base">
+                                        <p:cTn id="8" dur="500" fill="hold"/>
+                                        <p:tgtEl>
+                                          <p:spTgt spid="18"/>
+                                        </p:tgtEl>
+                                        <p:attrNameLst>
+                                          <p:attrName>ppt_y</p:attrName>
+                                        </p:attrNameLst>
+                                      </p:cBhvr>
+                                      <p:tavLst>
+                                        <p:tav tm="0">
+                                          <p:val>
+                                            <p:strVal val="1+#ppt_h/2"/>
+                                          </p:val>
+                                        </p:tav>
+                                        <p:tav tm="100000">
+                                          <p:val>
+                                            <p:strVal val="#ppt_y"/>
+                                          </p:val>
+                                        </p:tav>
+                                      </p:tavLst>
+                                    </p:anim>
+                                  </p:childTnLst>
+                                </p:cTn>
+                              </p:par>
+                            </p:childTnLst>
+                          </p:cTn>
+                        </p:par>
+                      </p:childTnLst>
+                    </p:cTn>
+                  </p:par>
+                </p:childTnLst>
+              </p:cTn>
+              <p:prevCondLst>
+                <p:cond evt="onPrev" delay="0">
+                  <p:tgtEl>
+                    <p:sldTgt/>
+                  </p:tgtEl>
+                </p:cond>
+              </p:prevCondLst>
+              <p:nextCondLst>
+                <p:cond evt="onNext" delay="0">
+                  <p:tgtEl>
+                    <p:sldTgt/>
+                  </p:tgtEl>
+                </p:cond>
+              </p:nextCondLst>
+            </p:seq>
+          </p:childTnLst>
+        </p:cTn>
+      </p:par>
+    </p:tnLst>
+    <p:bldLst>
+      <p:bldP spid="18" grpId="0"/>
+    </p:bldLst>
+  </p:timing>
+</p:sld>
+</file>
+
+<file path=ppt/slides/slide11.xml><?xml version="1.0" encoding="utf-8"?>
+<p:sld xmlns:a="http://schemas.openxmlformats.org/drawingml/2006/main" xmlns:r="http://schemas.openxmlformats.org/officeDocument/2006/relationships" xmlns:p="http://schemas.openxmlformats.org/presentationml/2006/main">
+  <p:cSld>
+    <p:spTree>
+      <p:nvGrpSpPr>
+        <p:cNvPr id="1" name="">
+          <a:extLst>
+            <a:ext uri="{FF2B5EF4-FFF2-40B4-BE49-F238E27FC236}">
+              <a16:creationId xmlns:a16="http://schemas.microsoft.com/office/drawing/2014/main" id="{284BE541-68F2-3566-FBBB-A7C13E62D721}"/>
+            </a:ext>
+          </a:extLst>
+        </p:cNvPr>
+        <p:cNvGrpSpPr/>
+        <p:nvPr/>
+      </p:nvGrpSpPr>
+      <p:grpSpPr>
+        <a:xfrm>
+          <a:off x="0" y="0"/>
+          <a:ext cx="0" cy="0"/>
+          <a:chOff x="0" y="0"/>
+          <a:chExt cx="0" cy="0"/>
+        </a:xfrm>
+      </p:grpSpPr>
+      <p:sp>
+        <p:nvSpPr>
+          <p:cNvPr id="18" name="文本框 3">
+            <a:extLst>
+              <a:ext uri="{FF2B5EF4-FFF2-40B4-BE49-F238E27FC236}">
+                <a16:creationId xmlns:a16="http://schemas.microsoft.com/office/drawing/2014/main" id="{15D322B8-0DD9-AE34-B4A5-EB854C4D4152}"/>
+              </a:ext>
+            </a:extLst>
+          </p:cNvPr>
+          <p:cNvSpPr txBox="1"/>
+          <p:nvPr/>
+        </p:nvSpPr>
+        <p:spPr>
+          <a:xfrm>
+            <a:off x="168965" y="318644"/>
+            <a:ext cx="9879810" cy="584775"/>
+          </a:xfrm>
+          <a:prstGeom prst="rect">
+            <a:avLst/>
+          </a:prstGeom>
+          <a:noFill/>
+          <a:effectLst/>
+        </p:spPr>
+        <p:txBody>
+          <a:bodyPr wrap="square" rtlCol="0">
+            <a:spAutoFit/>
+          </a:bodyPr>
+          <a:lstStyle/>
+          <a:p>
+            <a:r>
+              <a:rPr lang="en-US" altLang="zh-TW" sz="3200" b="1" kern="2200" spc="600" dirty="0">
+                <a:gradFill flip="none" rotWithShape="1">
+                  <a:gsLst>
+                    <a:gs pos="0">
+                      <a:srgbClr val="0070C0">
+                        <a:shade val="30000"/>
+                        <a:satMod val="115000"/>
+                      </a:srgbClr>
+                    </a:gs>
+                    <a:gs pos="44000">
+                      <a:srgbClr val="0070C0">
+                        <a:shade val="67500"/>
+                        <a:satMod val="115000"/>
+                      </a:srgbClr>
+                    </a:gs>
+                    <a:gs pos="75000">
+                      <a:srgbClr val="00B0F0"/>
+                    </a:gs>
+                    <a:gs pos="56000">
+                      <a:srgbClr val="0070C0">
+                        <a:shade val="100000"/>
+                        <a:satMod val="115000"/>
+                      </a:srgbClr>
+                    </a:gs>
+                  </a:gsLst>
+                  <a:lin ang="18000000" scaled="0"/>
+                  <a:tileRect/>
+                </a:gradFill>
+                <a:latin typeface="微软雅黑" pitchFamily="34" charset="-122"/>
+                <a:ea typeface="微软雅黑" pitchFamily="34" charset="-122"/>
+              </a:rPr>
+              <a:t>V7RC protocol </a:t>
+            </a:r>
+            <a:r>
+              <a:rPr lang="zh-TW" altLang="en-US" sz="3200" b="1" kern="2200" spc="600" dirty="0">
+                <a:gradFill flip="none" rotWithShape="1">
+                  <a:gsLst>
+                    <a:gs pos="0">
+                      <a:srgbClr val="0070C0">
+                        <a:shade val="30000"/>
+                        <a:satMod val="115000"/>
+                      </a:srgbClr>
+                    </a:gs>
+                    <a:gs pos="44000">
+                      <a:srgbClr val="0070C0">
+                        <a:shade val="67500"/>
+                        <a:satMod val="115000"/>
+                      </a:srgbClr>
+                    </a:gs>
+                    <a:gs pos="75000">
+                      <a:srgbClr val="00B0F0"/>
+                    </a:gs>
+                    <a:gs pos="56000">
+                      <a:srgbClr val="0070C0">
+                        <a:shade val="100000"/>
+                        <a:satMod val="115000"/>
+                      </a:srgbClr>
+                    </a:gs>
+                  </a:gsLst>
+                  <a:lin ang="18000000" scaled="0"/>
+                  <a:tileRect/>
+                </a:gradFill>
+                <a:latin typeface="微软雅黑" pitchFamily="34" charset="-122"/>
+                <a:ea typeface="微软雅黑" pitchFamily="34" charset="-122"/>
+              </a:rPr>
+              <a:t>說明</a:t>
+            </a:r>
+          </a:p>
+        </p:txBody>
+      </p:sp>
+      <p:grpSp>
+        <p:nvGrpSpPr>
+          <p:cNvPr id="4" name="群組 3">
+            <a:extLst>
+              <a:ext uri="{FF2B5EF4-FFF2-40B4-BE49-F238E27FC236}">
+                <a16:creationId xmlns:a16="http://schemas.microsoft.com/office/drawing/2014/main" id="{2F439C9F-0D3A-20C7-2933-D1A2EED8AE54}"/>
+              </a:ext>
+            </a:extLst>
+          </p:cNvPr>
+          <p:cNvGrpSpPr/>
+          <p:nvPr/>
+        </p:nvGrpSpPr>
+        <p:grpSpPr>
+          <a:xfrm>
+            <a:off x="905558" y="1128262"/>
+            <a:ext cx="10319490" cy="603306"/>
+            <a:chOff x="3975611" y="1640950"/>
+            <a:chExt cx="2382162" cy="482832"/>
+          </a:xfrm>
+        </p:grpSpPr>
+        <p:sp>
+          <p:nvSpPr>
+            <p:cNvPr id="5" name="圓角矩形 36">
+              <a:extLst>
+                <a:ext uri="{FF2B5EF4-FFF2-40B4-BE49-F238E27FC236}">
+                  <a16:creationId xmlns:a16="http://schemas.microsoft.com/office/drawing/2014/main" id="{4FDFD609-D501-A3CB-D836-33B216407C3B}"/>
+                </a:ext>
+              </a:extLst>
+            </p:cNvPr>
+            <p:cNvSpPr/>
+            <p:nvPr/>
+          </p:nvSpPr>
+          <p:spPr>
+            <a:xfrm>
+              <a:off x="3975611" y="1640950"/>
+              <a:ext cx="2382162" cy="482832"/>
+            </a:xfrm>
+            <a:prstGeom prst="roundRect">
+              <a:avLst/>
+            </a:prstGeom>
+          </p:spPr>
+          <p:style>
+            <a:lnRef idx="2">
+              <a:schemeClr val="accent1"/>
+            </a:lnRef>
+            <a:fillRef idx="1">
+              <a:schemeClr val="lt1"/>
+            </a:fillRef>
+            <a:effectRef idx="0">
+              <a:schemeClr val="accent1"/>
+            </a:effectRef>
+            <a:fontRef idx="minor">
+              <a:schemeClr val="dk1"/>
+            </a:fontRef>
+          </p:style>
+          <p:txBody>
+            <a:bodyPr rtlCol="0" anchor="ctr"/>
+            <a:lstStyle/>
+            <a:p>
+              <a:pPr algn="ctr"/>
+              <a:endParaRPr kumimoji="1" lang="zh-TW" altLang="en-US"/>
+            </a:p>
+          </p:txBody>
+        </p:sp>
+        <p:sp>
+          <p:nvSpPr>
+            <p:cNvPr id="7" name="文本框 3">
+              <a:extLst>
+                <a:ext uri="{FF2B5EF4-FFF2-40B4-BE49-F238E27FC236}">
+                  <a16:creationId xmlns:a16="http://schemas.microsoft.com/office/drawing/2014/main" id="{564DA8B2-B289-5441-D1E6-5F77E5BD9E03}"/>
+                </a:ext>
+              </a:extLst>
+            </p:cNvPr>
+            <p:cNvSpPr txBox="1"/>
+            <p:nvPr/>
+          </p:nvSpPr>
+          <p:spPr>
+            <a:xfrm>
+              <a:off x="4031520" y="1732753"/>
+              <a:ext cx="2326253" cy="320212"/>
+            </a:xfrm>
+            <a:prstGeom prst="rect">
+              <a:avLst/>
+            </a:prstGeom>
+            <a:noFill/>
+            <a:effectLst/>
+          </p:spPr>
+          <p:txBody>
+            <a:bodyPr wrap="square" rtlCol="0">
+              <a:spAutoFit/>
+            </a:bodyPr>
+            <a:lstStyle/>
+            <a:p>
+              <a:r>
+                <a:rPr lang="en-US" altLang="zh-CN" sz="2000" b="1" kern="2200" dirty="0">
+                  <a:gradFill flip="none" rotWithShape="1">
+                    <a:gsLst>
+                      <a:gs pos="0">
+                        <a:srgbClr val="0070C0">
+                          <a:shade val="30000"/>
+                          <a:satMod val="115000"/>
+                        </a:srgbClr>
+                      </a:gs>
+                      <a:gs pos="44000">
+                        <a:srgbClr val="0070C0">
+                          <a:shade val="67500"/>
+                          <a:satMod val="115000"/>
+                        </a:srgbClr>
+                      </a:gs>
+                      <a:gs pos="75000">
+                        <a:srgbClr val="00B0F0"/>
+                      </a:gs>
+                      <a:gs pos="56000">
+                        <a:srgbClr val="0070C0">
+                          <a:shade val="100000"/>
+                          <a:satMod val="115000"/>
+                        </a:srgbClr>
+                      </a:gs>
+                    </a:gsLst>
+                    <a:lin ang="18000000" scaled="0"/>
+                    <a:tileRect/>
+                  </a:gradFill>
+                  <a:latin typeface="+mj-lt"/>
+                  <a:ea typeface="Microsoft JhengHei" panose="020B0604030504040204" pitchFamily="34" charset="-120"/>
+                </a:rPr>
+                <a:t>D.CMD (</a:t>
+              </a:r>
+              <a:r>
+                <a:rPr lang="zh-TW" altLang="en-US" sz="2000" b="1" kern="2200" dirty="0">
+                  <a:gradFill flip="none" rotWithShape="1">
+                    <a:gsLst>
+                      <a:gs pos="0">
+                        <a:srgbClr val="0070C0">
+                          <a:shade val="30000"/>
+                          <a:satMod val="115000"/>
+                        </a:srgbClr>
+                      </a:gs>
+                      <a:gs pos="44000">
+                        <a:srgbClr val="0070C0">
+                          <a:shade val="67500"/>
+                          <a:satMod val="115000"/>
+                        </a:srgbClr>
+                      </a:gs>
+                      <a:gs pos="75000">
+                        <a:srgbClr val="00B0F0"/>
+                      </a:gs>
+                      <a:gs pos="56000">
+                        <a:srgbClr val="0070C0">
+                          <a:shade val="100000"/>
+                          <a:satMod val="115000"/>
+                        </a:srgbClr>
+                      </a:gs>
+                    </a:gsLst>
+                    <a:lin ang="18000000" scaled="0"/>
+                    <a:tileRect/>
+                  </a:gradFill>
+                  <a:latin typeface="+mj-lt"/>
+                  <a:ea typeface="Microsoft JhengHei" panose="020B0604030504040204" pitchFamily="34" charset="-120"/>
+                </a:rPr>
+                <a:t>表示傳遞給</a:t>
+              </a:r>
+              <a:r>
+                <a:rPr lang="en-US" altLang="zh-TW" sz="2000" b="1" kern="2200" dirty="0">
+                  <a:gradFill flip="none" rotWithShape="1">
+                    <a:gsLst>
+                      <a:gs pos="0">
+                        <a:srgbClr val="0070C0">
+                          <a:shade val="30000"/>
+                          <a:satMod val="115000"/>
+                        </a:srgbClr>
+                      </a:gs>
+                      <a:gs pos="44000">
+                        <a:srgbClr val="0070C0">
+                          <a:shade val="67500"/>
+                          <a:satMod val="115000"/>
+                        </a:srgbClr>
+                      </a:gs>
+                      <a:gs pos="75000">
+                        <a:srgbClr val="00B0F0"/>
+                      </a:gs>
+                      <a:gs pos="56000">
+                        <a:srgbClr val="0070C0">
+                          <a:shade val="100000"/>
+                          <a:satMod val="115000"/>
+                        </a:srgbClr>
+                      </a:gs>
+                    </a:gsLst>
+                    <a:lin ang="18000000" scaled="0"/>
+                    <a:tileRect/>
+                  </a:gradFill>
+                  <a:latin typeface="+mj-lt"/>
+                  <a:ea typeface="Microsoft JhengHei" panose="020B0604030504040204" pitchFamily="34" charset="-120"/>
+                </a:rPr>
+                <a:t>DEVICE</a:t>
+              </a:r>
+              <a:r>
+                <a:rPr lang="zh-TW" altLang="en-US" sz="2000" b="1" kern="2200" dirty="0">
+                  <a:gradFill flip="none" rotWithShape="1">
+                    <a:gsLst>
+                      <a:gs pos="0">
+                        <a:srgbClr val="0070C0">
+                          <a:shade val="30000"/>
+                          <a:satMod val="115000"/>
+                        </a:srgbClr>
+                      </a:gs>
+                      <a:gs pos="44000">
+                        <a:srgbClr val="0070C0">
+                          <a:shade val="67500"/>
+                          <a:satMod val="115000"/>
+                        </a:srgbClr>
+                      </a:gs>
+                      <a:gs pos="75000">
+                        <a:srgbClr val="00B0F0"/>
+                      </a:gs>
+                      <a:gs pos="56000">
+                        <a:srgbClr val="0070C0">
+                          <a:shade val="100000"/>
+                          <a:satMod val="115000"/>
+                        </a:srgbClr>
+                      </a:gs>
+                    </a:gsLst>
+                    <a:lin ang="18000000" scaled="0"/>
+                    <a:tileRect/>
+                  </a:gradFill>
+                  <a:latin typeface="+mj-lt"/>
+                  <a:ea typeface="Microsoft JhengHei" panose="020B0604030504040204" pitchFamily="34" charset="-120"/>
+                </a:rPr>
+                <a:t>的控制命令，最大的長度為</a:t>
+              </a:r>
+              <a:r>
+                <a:rPr lang="en-US" altLang="zh-TW" sz="2000" b="1" kern="2200" dirty="0">
+                  <a:gradFill flip="none" rotWithShape="1">
+                    <a:gsLst>
+                      <a:gs pos="0">
+                        <a:srgbClr val="0070C0">
+                          <a:shade val="30000"/>
+                          <a:satMod val="115000"/>
+                        </a:srgbClr>
+                      </a:gs>
+                      <a:gs pos="44000">
+                        <a:srgbClr val="0070C0">
+                          <a:shade val="67500"/>
+                          <a:satMod val="115000"/>
+                        </a:srgbClr>
+                      </a:gs>
+                      <a:gs pos="75000">
+                        <a:srgbClr val="00B0F0"/>
+                      </a:gs>
+                      <a:gs pos="56000">
+                        <a:srgbClr val="0070C0">
+                          <a:shade val="100000"/>
+                          <a:satMod val="115000"/>
+                        </a:srgbClr>
+                      </a:gs>
+                    </a:gsLst>
+                    <a:lin ang="18000000" scaled="0"/>
+                    <a:tileRect/>
+                  </a:gradFill>
+                  <a:latin typeface="+mj-lt"/>
+                  <a:ea typeface="Microsoft JhengHei" panose="020B0604030504040204" pitchFamily="34" charset="-120"/>
+                </a:rPr>
+                <a:t>16</a:t>
+              </a:r>
+              <a:r>
+                <a:rPr lang="zh-TW" altLang="en-US" sz="2000" b="1" kern="2200" dirty="0">
+                  <a:gradFill flip="none" rotWithShape="1">
+                    <a:gsLst>
+                      <a:gs pos="0">
+                        <a:srgbClr val="0070C0">
+                          <a:shade val="30000"/>
+                          <a:satMod val="115000"/>
+                        </a:srgbClr>
+                      </a:gs>
+                      <a:gs pos="44000">
+                        <a:srgbClr val="0070C0">
+                          <a:shade val="67500"/>
+                          <a:satMod val="115000"/>
+                        </a:srgbClr>
+                      </a:gs>
+                      <a:gs pos="75000">
+                        <a:srgbClr val="00B0F0"/>
+                      </a:gs>
+                      <a:gs pos="56000">
+                        <a:srgbClr val="0070C0">
+                          <a:shade val="100000"/>
+                          <a:satMod val="115000"/>
+                        </a:srgbClr>
+                      </a:gs>
+                    </a:gsLst>
+                    <a:lin ang="18000000" scaled="0"/>
+                    <a:tileRect/>
+                  </a:gradFill>
+                  <a:latin typeface="+mj-lt"/>
+                  <a:ea typeface="Microsoft JhengHei" panose="020B0604030504040204" pitchFamily="34" charset="-120"/>
+                </a:rPr>
+                <a:t>字元</a:t>
+              </a:r>
+              <a:r>
+                <a:rPr lang="en-US" altLang="zh-TW" sz="2000" b="1" kern="2200" dirty="0">
+                  <a:gradFill flip="none" rotWithShape="1">
+                    <a:gsLst>
+                      <a:gs pos="0">
+                        <a:srgbClr val="0070C0">
+                          <a:shade val="30000"/>
+                          <a:satMod val="115000"/>
+                        </a:srgbClr>
+                      </a:gs>
+                      <a:gs pos="44000">
+                        <a:srgbClr val="0070C0">
+                          <a:shade val="67500"/>
+                          <a:satMod val="115000"/>
+                        </a:srgbClr>
+                      </a:gs>
+                      <a:gs pos="75000">
+                        <a:srgbClr val="00B0F0"/>
+                      </a:gs>
+                      <a:gs pos="56000">
+                        <a:srgbClr val="0070C0">
+                          <a:shade val="100000"/>
+                          <a:satMod val="115000"/>
+                        </a:srgbClr>
+                      </a:gs>
+                    </a:gsLst>
+                    <a:lin ang="18000000" scaled="0"/>
+                    <a:tileRect/>
+                  </a:gradFill>
+                  <a:latin typeface="+mj-lt"/>
+                  <a:ea typeface="Microsoft JhengHei" panose="020B0604030504040204" pitchFamily="34" charset="-120"/>
+                </a:rPr>
+                <a:t>)</a:t>
+              </a:r>
+              <a:endParaRPr lang="zh-CN" altLang="en-US" sz="2000" b="1" kern="2200" dirty="0">
+                <a:solidFill>
+                  <a:schemeClr val="accent2">
+                    <a:lumMod val="75000"/>
+                  </a:schemeClr>
+                </a:solidFill>
+                <a:latin typeface="+mj-lt"/>
+                <a:ea typeface="Microsoft JhengHei" panose="020B0604030504040204" pitchFamily="34" charset="-120"/>
+              </a:endParaRPr>
+            </a:p>
+          </p:txBody>
+        </p:sp>
+      </p:grpSp>
+      <p:sp>
+        <p:nvSpPr>
+          <p:cNvPr id="8" name="文字方塊 7">
+            <a:extLst>
+              <a:ext uri="{FF2B5EF4-FFF2-40B4-BE49-F238E27FC236}">
+                <a16:creationId xmlns:a16="http://schemas.microsoft.com/office/drawing/2014/main" id="{0A546CE7-4E20-42FF-3E69-113A099D8636}"/>
+              </a:ext>
+            </a:extLst>
+          </p:cNvPr>
+          <p:cNvSpPr txBox="1"/>
+          <p:nvPr/>
+        </p:nvSpPr>
+        <p:spPr>
+          <a:xfrm>
+            <a:off x="1340261" y="1956411"/>
+            <a:ext cx="9278753" cy="1287917"/>
+          </a:xfrm>
+          <a:prstGeom prst="rect">
+            <a:avLst/>
+          </a:prstGeom>
+          <a:noFill/>
+        </p:spPr>
+        <p:txBody>
+          <a:bodyPr wrap="square" rtlCol="0">
+            <a:spAutoFit/>
+          </a:bodyPr>
+          <a:lstStyle/>
+          <a:p>
+            <a:pPr>
+              <a:lnSpc>
+                <a:spcPct val="150000"/>
+              </a:lnSpc>
+            </a:pPr>
+            <a:r>
+              <a:rPr kumimoji="1" lang="zh-TW" altLang="en-US" dirty="0">
+                <a:latin typeface="Microsoft JhengHei" panose="020B0604030504040204" pitchFamily="34" charset="-120"/>
+                <a:ea typeface="Microsoft JhengHei" panose="020B0604030504040204" pitchFamily="34" charset="-120"/>
+              </a:rPr>
+              <a:t>這個命令可以傳遞給</a:t>
+            </a:r>
+            <a:r>
+              <a:rPr kumimoji="1" lang="en-US" altLang="zh-TW" dirty="0">
+                <a:latin typeface="Microsoft JhengHei" panose="020B0604030504040204" pitchFamily="34" charset="-120"/>
+                <a:ea typeface="Microsoft JhengHei" panose="020B0604030504040204" pitchFamily="34" charset="-120"/>
+              </a:rPr>
+              <a:t>DEVICE</a:t>
+            </a:r>
+            <a:r>
+              <a:rPr kumimoji="1" lang="zh-TW" altLang="en-US" dirty="0">
+                <a:latin typeface="Microsoft JhengHei" panose="020B0604030504040204" pitchFamily="34" charset="-120"/>
+                <a:ea typeface="Microsoft JhengHei" panose="020B0604030504040204" pitchFamily="34" charset="-120"/>
+              </a:rPr>
+              <a:t>端命令控制，這完全由</a:t>
+            </a:r>
+            <a:r>
+              <a:rPr kumimoji="1" lang="en-US" altLang="zh-TW" dirty="0">
+                <a:latin typeface="Microsoft JhengHei" panose="020B0604030504040204" pitchFamily="34" charset="-120"/>
+                <a:ea typeface="Microsoft JhengHei" panose="020B0604030504040204" pitchFamily="34" charset="-120"/>
+              </a:rPr>
+              <a:t>DEVICE</a:t>
+            </a:r>
+            <a:r>
+              <a:rPr kumimoji="1" lang="zh-TW" altLang="en-US" dirty="0">
+                <a:latin typeface="Microsoft JhengHei" panose="020B0604030504040204" pitchFamily="34" charset="-120"/>
+                <a:ea typeface="Microsoft JhengHei" panose="020B0604030504040204" pitchFamily="34" charset="-120"/>
+              </a:rPr>
+              <a:t>端開發者自行定義，例如：</a:t>
+            </a:r>
+            <a:r>
+              <a:rPr kumimoji="1" lang="en-US" altLang="zh-TW" dirty="0">
+                <a:latin typeface="Microsoft JhengHei" panose="020B0604030504040204" pitchFamily="34" charset="-120"/>
+                <a:ea typeface="Microsoft JhengHei" panose="020B0604030504040204" pitchFamily="34" charset="-120"/>
+              </a:rPr>
+              <a:t>RESET, </a:t>
+            </a:r>
+            <a:r>
+              <a:rPr kumimoji="1" lang="zh-TW" altLang="en-US" dirty="0">
+                <a:latin typeface="Microsoft JhengHei" panose="020B0604030504040204" pitchFamily="34" charset="-120"/>
+                <a:ea typeface="Microsoft JhengHei" panose="020B0604030504040204" pitchFamily="34" charset="-120"/>
+              </a:rPr>
+              <a:t>可以用 </a:t>
+            </a:r>
+            <a:r>
+              <a:rPr kumimoji="1" lang="en-US" altLang="zh-TW" dirty="0">
+                <a:latin typeface="Microsoft JhengHei" panose="020B0604030504040204" pitchFamily="34" charset="-120"/>
+                <a:ea typeface="Microsoft JhengHei" panose="020B0604030504040204" pitchFamily="34" charset="-120"/>
+              </a:rPr>
+              <a:t>“CMDRESET          #” </a:t>
+            </a:r>
+            <a:r>
+              <a:rPr kumimoji="1" lang="zh-TW" altLang="en-US" dirty="0">
+                <a:latin typeface="Microsoft JhengHei" panose="020B0604030504040204" pitchFamily="34" charset="-120"/>
+                <a:ea typeface="Microsoft JhengHei" panose="020B0604030504040204" pitchFamily="34" charset="-120"/>
+              </a:rPr>
+              <a:t>命令的長度如果不滿</a:t>
+            </a:r>
+            <a:r>
+              <a:rPr kumimoji="1" lang="en-US" altLang="zh-TW" dirty="0">
+                <a:latin typeface="Microsoft JhengHei" panose="020B0604030504040204" pitchFamily="34" charset="-120"/>
+                <a:ea typeface="Microsoft JhengHei" panose="020B0604030504040204" pitchFamily="34" charset="-120"/>
+              </a:rPr>
+              <a:t>16</a:t>
+            </a:r>
+            <a:r>
+              <a:rPr kumimoji="1" lang="zh-TW" altLang="en-US" dirty="0">
+                <a:latin typeface="Microsoft JhengHei" panose="020B0604030504040204" pitchFamily="34" charset="-120"/>
+                <a:ea typeface="Microsoft JhengHei" panose="020B0604030504040204" pitchFamily="34" charset="-120"/>
+              </a:rPr>
+              <a:t>個字元，則用空白符號補足，結尾符號為</a:t>
+            </a:r>
+            <a:r>
+              <a:rPr kumimoji="1" lang="en-US" altLang="zh-TW" dirty="0">
+                <a:latin typeface="Microsoft JhengHei" panose="020B0604030504040204" pitchFamily="34" charset="-120"/>
+                <a:ea typeface="Microsoft JhengHei" panose="020B0604030504040204" pitchFamily="34" charset="-120"/>
+              </a:rPr>
+              <a:t>#</a:t>
+            </a:r>
+          </a:p>
+        </p:txBody>
+      </p:sp>
+    </p:spTree>
+    <p:extLst>
+      <p:ext uri="{BB962C8B-B14F-4D97-AF65-F5344CB8AC3E}">
+        <p14:creationId xmlns:p14="http://schemas.microsoft.com/office/powerpoint/2010/main" val="1018424942"/>
       </p:ext>
     </p:extLst>
   </p:cSld>
